--- a/dist/초2/과학/생물과변화/초2_과학_생물과변화_02_계절과동식물_학생용.pptx
+++ b/dist/초2/과학/생물과변화/초2_과학_생물과변화_02_계절과동식물_학생용.pptx
@@ -118,19 +118,19 @@
   <p:extLst>
     <p:ext uri="{521415D9-36F7-43E2-AB2F-B90AF26B5E84}">
       <p14:sectionLst xmlns:p14="http://schemas.microsoft.com/office/powerpoint/2010/main">
-        <p14:section name="도입" id="{3a0830ed-9c58-b85a-c1f4-302822ca0d40}">
+        <p14:section name="도입" id="{03e38d97-a83e-8bb1-5a91-88e27e17e916}">
           <p14:sldIdLst>
             <p14:sldId id="256"/>
             <p14:sldId id="257"/>
           </p14:sldIdLst>
         </p14:section>
-        <p14:section name="개념" id="{e085fa42-74b3-1ccb-77ff-24ce17c7d0ff}">
+        <p14:section name="개념" id="{7463aef9-2e41-e4e7-258c-b835ec67744c}">
           <p14:sldIdLst>
             <p14:sldId id="258"/>
             <p14:sldId id="261"/>
           </p14:sldIdLst>
         </p14:section>
-        <p14:section name="연습" id="{b6b233b0-b07c-cbfb-0b66-41cc5a869319}">
+        <p14:section name="연습" id="{a82a838d-d0da-6986-72ab-b2b960b8bc78}">
           <p14:sldIdLst>
             <p14:sldId id="259"/>
             <p14:sldId id="260"/>
@@ -139,23 +139,23 @@
             <p14:sldId id="264"/>
           </p14:sldIdLst>
         </p14:section>
-        <p14:section name="개념" id="{4842800c-9cbb-49fd-ad6f-9863e77ac460}">
+        <p14:section name="개념" id="{ce202018-7d35-b71b-9a8e-5f814d2c7491}">
           <p14:sldIdLst/>
         </p14:section>
-        <p14:section name="연습" id="{973100ac-5932-e5fd-6fa8-1489a3de9b92}">
+        <p14:section name="연습" id="{d03b42ad-f2db-9bda-d93d-7021a3a7b0ba}">
           <p14:sldIdLst/>
         </p14:section>
-        <p14:section name="확인" id="{e77e0fc0-50bf-fab2-e521-da40b1a1b651}">
+        <p14:section name="확인" id="{210c088d-a3c9-58cf-2da6-c7d468d77065}">
           <p14:sldIdLst>
             <p14:sldId id="265"/>
           </p14:sldIdLst>
         </p14:section>
-        <p14:section name="정리" id="{4c3c0a55-d7d2-48ea-5854-7a6a19e73109}">
+        <p14:section name="정리" id="{c72cd3cb-83f4-88ae-fb2b-22c879d949c8}">
           <p14:sldIdLst>
             <p14:sldId id="266"/>
           </p14:sldIdLst>
         </p14:section>
-        <p14:section name="보충" id="{6f93155b-fdc4-082c-1126-52e051f58b09}">
+        <p14:section name="보충" id="{b726628e-294d-143b-65ea-deb3ae9f2b1f}">
           <p14:sldIdLst>
             <p14:sldId id="267"/>
           </p14:sldIdLst>
